--- a/TrustGate_Notebook_and_Pipeline.pptx
+++ b/TrustGate_Notebook_and_Pipeline.pptx
@@ -10971,7 +10971,7 @@
                           <a:ea typeface="Calibri" pitchFamily="34" charset="-122"/>
                           <a:cs typeface="Calibri" pitchFamily="34" charset="-120"/>
                         </a:rPr>
-                        <a:t>5% at 60% precision</a:t>
+                        <a:t>10% at 58% precision</a:t>
                       </a:r>
                       <a:endParaRPr lang="en-US" sz="1000" dirty="0">
                         <a:latin typeface="Calibri" charset="0"/>
@@ -11168,7 +11168,7 @@
                           <a:ea typeface="Calibri" pitchFamily="34" charset="-122"/>
                           <a:cs typeface="Calibri" pitchFamily="34" charset="-120"/>
                         </a:rPr>
-                        <a:t>86% at 71% precision</a:t>
+                        <a:t>89% at 70% precision</a:t>
                       </a:r>
                       <a:endParaRPr lang="en-US" sz="1000" dirty="0">
                         <a:latin typeface="Calibri" charset="0"/>
@@ -11321,7 +11321,7 @@
                 <a:ea typeface="Calibri" pitchFamily="34" charset="-122"/>
                 <a:cs typeface="Calibri" pitchFamily="34" charset="-120"/>
               </a:rPr>
-              <a:t>Code-health features for the full set were still computing when these numbers were taken.</a:t>
+              <a:t>Code health and text similarity add almost nothing on top of agreement on either split. Agreement carries the signal.</a:t>
             </a:r>
             <a:endParaRPr lang="en-US" sz="950" dirty="0"/>
           </a:p>

--- a/TrustGate_Notebook_and_Pipeline.pptx
+++ b/TrustGate_Notebook_and_Pipeline.pptx
@@ -12740,7 +12740,7 @@
                 <a:ea typeface="Courier New" pitchFamily="34" charset="-122"/>
                 <a:cs typeface="Courier New" pitchFamily="34" charset="-120"/>
               </a:rPr>
-              <a:t>git clone &lt;repo-url&gt; trustgate &amp;&amp; cd trustgate</a:t>
+              <a:t>git clone https://github.com/hatemphd/MLE_POC.git trustgate &amp;&amp; cd trustgate</a:t>
             </a:r>
             <a:endParaRPr lang="en-US" sz="1000" dirty="0"/>
           </a:p>
